--- a/reference_material/slides/009_using_analytical_1.pptx
+++ b/reference_material/slides/009_using_analytical_1.pptx
@@ -12,7 +12,15 @@
     <p:sldId id="260" r:id="rId6"/>
     <p:sldId id="261" r:id="rId7"/>
     <p:sldId id="262" r:id="rId8"/>
-    <p:sldId id="263" r:id="rId9"/>
+    <p:sldId id="266" r:id="rId9"/>
+    <p:sldId id="265" r:id="rId10"/>
+    <p:sldId id="264" r:id="rId11"/>
+    <p:sldId id="267" r:id="rId12"/>
+    <p:sldId id="268" r:id="rId13"/>
+    <p:sldId id="269" r:id="rId14"/>
+    <p:sldId id="271" r:id="rId15"/>
+    <p:sldId id="270" r:id="rId16"/>
+    <p:sldId id="263" r:id="rId17"/>
   </p:sldIdLst>
   <p:sldSz cx="12192000" cy="6858000"/>
   <p:notesSz cx="6858000" cy="9144000"/>
@@ -111,6 +119,11 @@
       </a:defRPr>
     </a:lvl9pPr>
   </p:defaultTextStyle>
+  <p:extLst>
+    <p:ext uri="{EFAFB233-063F-42B5-8137-9DF3F51BA10A}">
+      <p15:sldGuideLst xmlns:p15="http://schemas.microsoft.com/office/powerpoint/2012/main"/>
+    </p:ext>
+  </p:extLst>
 </p:presentation>
 </file>
 
@@ -253,7 +266,7 @@
           <a:p>
             <a:fld id="{267EA758-9496-214F-A167-78EC48715B87}" type="datetimeFigureOut">
               <a:rPr lang="en-US" smtClean="0"/>
-              <a:t>9/25/25</a:t>
+              <a:t>9/18/26</a:t>
             </a:fld>
             <a:endParaRPr lang="en-US"/>
           </a:p>
@@ -464,7 +477,7 @@
           <a:p>
             <a:fld id="{267EA758-9496-214F-A167-78EC48715B87}" type="datetimeFigureOut">
               <a:rPr lang="en-US" smtClean="0"/>
-              <a:t>9/25/25</a:t>
+              <a:t>9/18/26</a:t>
             </a:fld>
             <a:endParaRPr lang="en-US"/>
           </a:p>
@@ -679,7 +692,7 @@
           <a:p>
             <a:fld id="{267EA758-9496-214F-A167-78EC48715B87}" type="datetimeFigureOut">
               <a:rPr lang="en-US" smtClean="0"/>
-              <a:t>9/25/25</a:t>
+              <a:t>9/18/26</a:t>
             </a:fld>
             <a:endParaRPr lang="en-US"/>
           </a:p>
@@ -880,7 +893,7 @@
           <a:p>
             <a:fld id="{267EA758-9496-214F-A167-78EC48715B87}" type="datetimeFigureOut">
               <a:rPr lang="en-US" smtClean="0"/>
-              <a:t>9/25/25</a:t>
+              <a:t>9/18/26</a:t>
             </a:fld>
             <a:endParaRPr lang="en-US"/>
           </a:p>
@@ -1159,7 +1172,7 @@
           <a:p>
             <a:fld id="{267EA758-9496-214F-A167-78EC48715B87}" type="datetimeFigureOut">
               <a:rPr lang="en-US" smtClean="0"/>
-              <a:t>9/25/25</a:t>
+              <a:t>9/18/26</a:t>
             </a:fld>
             <a:endParaRPr lang="en-US"/>
           </a:p>
@@ -1427,7 +1440,7 @@
           <a:p>
             <a:fld id="{267EA758-9496-214F-A167-78EC48715B87}" type="datetimeFigureOut">
               <a:rPr lang="en-US" smtClean="0"/>
-              <a:t>9/25/25</a:t>
+              <a:t>9/18/26</a:t>
             </a:fld>
             <a:endParaRPr lang="en-US"/>
           </a:p>
@@ -1843,7 +1856,7 @@
           <a:p>
             <a:fld id="{267EA758-9496-214F-A167-78EC48715B87}" type="datetimeFigureOut">
               <a:rPr lang="en-US" smtClean="0"/>
-              <a:t>9/25/25</a:t>
+              <a:t>9/18/26</a:t>
             </a:fld>
             <a:endParaRPr lang="en-US"/>
           </a:p>
@@ -1992,7 +2005,7 @@
           <a:p>
             <a:fld id="{267EA758-9496-214F-A167-78EC48715B87}" type="datetimeFigureOut">
               <a:rPr lang="en-US" smtClean="0"/>
-              <a:t>9/25/25</a:t>
+              <a:t>9/18/26</a:t>
             </a:fld>
             <a:endParaRPr lang="en-US"/>
           </a:p>
@@ -2118,7 +2131,7 @@
           <a:p>
             <a:fld id="{267EA758-9496-214F-A167-78EC48715B87}" type="datetimeFigureOut">
               <a:rPr lang="en-US" smtClean="0"/>
-              <a:t>9/25/25</a:t>
+              <a:t>9/18/26</a:t>
             </a:fld>
             <a:endParaRPr lang="en-US"/>
           </a:p>
@@ -2369,7 +2382,7 @@
           <a:p>
             <a:fld id="{267EA758-9496-214F-A167-78EC48715B87}" type="datetimeFigureOut">
               <a:rPr lang="en-US" smtClean="0"/>
-              <a:t>9/25/25</a:t>
+              <a:t>9/18/26</a:t>
             </a:fld>
             <a:endParaRPr lang="en-US"/>
           </a:p>
@@ -2814,7 +2827,7 @@
           <a:p>
             <a:fld id="{267EA758-9496-214F-A167-78EC48715B87}" type="datetimeFigureOut">
               <a:rPr lang="en-US" smtClean="0"/>
-              <a:t>9/25/25</a:t>
+              <a:t>9/18/26</a:t>
             </a:fld>
             <a:endParaRPr lang="en-US"/>
           </a:p>
@@ -2981,6 +2994,13 @@
             <a:schemeClr val="lt1"/>
           </a:fontRef>
         </p:style>
+        <p:txBody>
+          <a:bodyPr/>
+          <a:lstStyle/>
+          <a:p>
+            <a:endParaRPr lang="en-US"/>
+          </a:p>
+        </p:txBody>
       </p:sp>
       <p:pic>
         <p:nvPicPr>
@@ -3141,7 +3161,7 @@
           <a:p>
             <a:fld id="{267EA758-9496-214F-A167-78EC48715B87}" type="datetimeFigureOut">
               <a:rPr lang="en-US" smtClean="0"/>
-              <a:t>9/25/25</a:t>
+              <a:t>9/18/26</a:t>
             </a:fld>
             <a:endParaRPr lang="en-US"/>
           </a:p>
@@ -3671,7 +3691,12 @@
             <p:ph idx="1"/>
           </p:nvPr>
         </p:nvSpPr>
-        <p:spPr/>
+        <p:spPr>
+          <a:xfrm>
+            <a:off x="1451579" y="2015732"/>
+            <a:ext cx="9603275" cy="3874705"/>
+          </a:xfrm>
+        </p:spPr>
         <p:txBody>
           <a:bodyPr/>
           <a:lstStyle/>
@@ -3689,26 +3714,92 @@
             </a:r>
           </a:p>
           <a:p>
+            <a:pPr lvl="2"/>
+            <a:r>
+              <a:rPr lang="en-US" dirty="0"/>
+              <a:t>Revised/simplified workbook (009) on some of the </a:t>
+            </a:r>
+            <a:r>
+              <a:rPr lang="en-US" dirty="0" err="1"/>
+              <a:t>scipy</a:t>
+            </a:r>
+            <a:r>
+              <a:rPr lang="en-US" dirty="0"/>
+              <a:t> stuff. Pull </a:t>
+            </a:r>
+            <a:r>
+              <a:rPr lang="en-US"/>
+              <a:t>for update. </a:t>
+            </a:r>
+            <a:endParaRPr lang="en-US" dirty="0"/>
+          </a:p>
+          <a:p>
             <a:pPr lvl="1"/>
             <a:r>
               <a:rPr lang="en-US" dirty="0"/>
-              <a:t>Some long-</a:t>
+              <a:t>Normal testing and plots. </a:t>
+            </a:r>
+          </a:p>
+          <a:p>
+            <a:r>
+              <a:rPr lang="en-US" dirty="0"/>
+              <a:t>There’s a quiz in a week!</a:t>
+            </a:r>
+          </a:p>
+          <a:p>
+            <a:pPr lvl="1"/>
+            <a:r>
+              <a:rPr lang="en-US" dirty="0"/>
+              <a:t>It isn’t really all that hard, exceedingly complex, or super long. </a:t>
+            </a:r>
+          </a:p>
+          <a:p>
+            <a:pPr lvl="1"/>
+            <a:r>
+              <a:rPr lang="en-US" dirty="0"/>
+              <a:t>Some mc/short answer on theory + you’ll get data and calculate answers. </a:t>
+            </a:r>
+          </a:p>
+          <a:p>
+            <a:pPr lvl="1"/>
+            <a:r>
+              <a:rPr lang="en-US" dirty="0"/>
+              <a:t>Responses only in Brightspace, no code submissions, </a:t>
             </a:r>
             <a:r>
               <a:rPr lang="en-US" dirty="0" err="1"/>
-              <a:t>ish</a:t>
-            </a:r>
-            <a:r>
-              <a:rPr lang="en-US" dirty="0"/>
-              <a:t> exercises in there. </a:t>
+              <a:t>github</a:t>
+            </a:r>
+            <a:r>
+              <a:rPr lang="en-US" dirty="0"/>
+              <a:t> stuff, </a:t>
+            </a:r>
+            <a:r>
+              <a:rPr lang="en-US" dirty="0" err="1"/>
+              <a:t>etc</a:t>
+            </a:r>
+            <a:r>
+              <a:rPr lang="en-US" dirty="0"/>
+              <a:t>…</a:t>
             </a:r>
           </a:p>
           <a:p>
             <a:pPr lvl="1"/>
             <a:r>
-              <a:rPr lang="en-US"/>
-              <a:t>Normal testing and plots. </a:t>
-            </a:r>
+              <a:rPr lang="en-US" dirty="0"/>
+              <a:t>Cutoff for content today, analytical </a:t>
+            </a:r>
+            <a:r>
+              <a:rPr lang="en-US" dirty="0" err="1"/>
+              <a:t>dists</a:t>
+            </a:r>
+            <a:r>
+              <a:rPr lang="en-US" dirty="0"/>
+              <a:t>. I’ll write the quiz and a small guide this weekend. </a:t>
+            </a:r>
+          </a:p>
+          <a:p>
+            <a:pPr lvl="1"/>
             <a:endParaRPr lang="en-US" dirty="0"/>
           </a:p>
         </p:txBody>
@@ -3717,6 +3808,1110 @@
     <p:extLst>
       <p:ext uri="{BB962C8B-B14F-4D97-AF65-F5344CB8AC3E}">
         <p14:creationId xmlns:p14="http://schemas.microsoft.com/office/powerpoint/2010/main" val="3606256040"/>
+      </p:ext>
+    </p:extLst>
+  </p:cSld>
+  <p:clrMapOvr>
+    <a:masterClrMapping/>
+  </p:clrMapOvr>
+</p:sld>
+</file>
+
+<file path=ppt/slides/slide10.xml><?xml version="1.0" encoding="utf-8"?>
+<p:sld xmlns:a="http://schemas.openxmlformats.org/drawingml/2006/main" xmlns:r="http://schemas.openxmlformats.org/officeDocument/2006/relationships" xmlns:p="http://schemas.openxmlformats.org/presentationml/2006/main">
+  <p:cSld>
+    <p:spTree>
+      <p:nvGrpSpPr>
+        <p:cNvPr id="1" name=""/>
+        <p:cNvGrpSpPr/>
+        <p:nvPr/>
+      </p:nvGrpSpPr>
+      <p:grpSpPr>
+        <a:xfrm>
+          <a:off x="0" y="0"/>
+          <a:ext cx="0" cy="0"/>
+          <a:chOff x="0" y="0"/>
+          <a:chExt cx="0" cy="0"/>
+        </a:xfrm>
+      </p:grpSpPr>
+      <p:sp>
+        <p:nvSpPr>
+          <p:cNvPr id="2" name="Title 1">
+            <a:extLst>
+              <a:ext uri="{FF2B5EF4-FFF2-40B4-BE49-F238E27FC236}">
+                <a16:creationId xmlns:a16="http://schemas.microsoft.com/office/drawing/2014/main" id="{BE19E806-837F-034C-B16B-3FC7878B3AB0}"/>
+              </a:ext>
+            </a:extLst>
+          </p:cNvPr>
+          <p:cNvSpPr>
+            <a:spLocks noGrp="1"/>
+          </p:cNvSpPr>
+          <p:nvPr>
+            <p:ph type="title"/>
+          </p:nvPr>
+        </p:nvSpPr>
+        <p:spPr/>
+        <p:txBody>
+          <a:bodyPr/>
+          <a:lstStyle/>
+          <a:p>
+            <a:r>
+              <a:rPr lang="en-US" dirty="0"/>
+              <a:t>Exponential. </a:t>
+            </a:r>
+          </a:p>
+        </p:txBody>
+      </p:sp>
+      <p:sp>
+        <p:nvSpPr>
+          <p:cNvPr id="3" name="Content Placeholder 2">
+            <a:extLst>
+              <a:ext uri="{FF2B5EF4-FFF2-40B4-BE49-F238E27FC236}">
+                <a16:creationId xmlns:a16="http://schemas.microsoft.com/office/drawing/2014/main" id="{2A0BF8EE-F2BD-A338-0590-8B0FA567C07B}"/>
+              </a:ext>
+            </a:extLst>
+          </p:cNvPr>
+          <p:cNvSpPr>
+            <a:spLocks noGrp="1"/>
+          </p:cNvSpPr>
+          <p:nvPr>
+            <p:ph idx="1"/>
+          </p:nvPr>
+        </p:nvSpPr>
+        <p:spPr>
+          <a:xfrm>
+            <a:off x="1451579" y="1853754"/>
+            <a:ext cx="5454371" cy="4199727"/>
+          </a:xfrm>
+        </p:spPr>
+        <p:txBody>
+          <a:bodyPr/>
+          <a:lstStyle/>
+          <a:p>
+            <a:r>
+              <a:rPr lang="en-US" dirty="0"/>
+              <a:t>Defined by:</a:t>
+            </a:r>
+          </a:p>
+          <a:p>
+            <a:pPr lvl="1"/>
+            <a:r>
+              <a:rPr lang="en-US" dirty="0"/>
+              <a:t>Lambda: rate of things happening. </a:t>
+            </a:r>
+          </a:p>
+          <a:p>
+            <a:pPr lvl="1"/>
+            <a:r>
+              <a:rPr lang="en-US" dirty="0"/>
+              <a:t>Threshold: lowest possible value. </a:t>
+            </a:r>
+          </a:p>
+          <a:p>
+            <a:r>
+              <a:rPr lang="en-US" dirty="0" err="1"/>
+              <a:t>Scipy</a:t>
+            </a:r>
+            <a:r>
+              <a:rPr lang="en-US" dirty="0"/>
+              <a:t> variables:</a:t>
+            </a:r>
+          </a:p>
+          <a:p>
+            <a:pPr lvl="1"/>
+            <a:r>
+              <a:rPr lang="en-US" dirty="0"/>
+              <a:t>Scale = mean. </a:t>
+            </a:r>
+          </a:p>
+          <a:p>
+            <a:pPr lvl="1"/>
+            <a:r>
+              <a:rPr lang="en-US" dirty="0"/>
+              <a:t>Loc = minimum. </a:t>
+            </a:r>
+          </a:p>
+          <a:p>
+            <a:r>
+              <a:rPr lang="en-US" dirty="0"/>
+              <a:t>Frequent in viral spread, rare occurrences. </a:t>
+            </a:r>
+          </a:p>
+          <a:p>
+            <a:r>
+              <a:rPr lang="en-US" dirty="0"/>
+              <a:t>Can do log plots to check fit. </a:t>
+            </a:r>
+          </a:p>
+        </p:txBody>
+      </p:sp>
+      <p:pic>
+        <p:nvPicPr>
+          <p:cNvPr id="4" name="Picture 3">
+            <a:extLst>
+              <a:ext uri="{FF2B5EF4-FFF2-40B4-BE49-F238E27FC236}">
+                <a16:creationId xmlns:a16="http://schemas.microsoft.com/office/drawing/2014/main" id="{73D7B160-CC48-893B-DE8B-17B9991C9EB3}"/>
+              </a:ext>
+            </a:extLst>
+          </p:cNvPr>
+          <p:cNvPicPr>
+            <a:picLocks noChangeAspect="1"/>
+          </p:cNvPicPr>
+          <p:nvPr/>
+        </p:nvPicPr>
+        <p:blipFill>
+          <a:blip r:embed="rId2"/>
+          <a:stretch>
+            <a:fillRect/>
+          </a:stretch>
+        </p:blipFill>
+        <p:spPr>
+          <a:xfrm>
+            <a:off x="7035800" y="305052"/>
+            <a:ext cx="5156200" cy="3886200"/>
+          </a:xfrm>
+          <a:prstGeom prst="rect">
+            <a:avLst/>
+          </a:prstGeom>
+        </p:spPr>
+      </p:pic>
+      <p:pic>
+        <p:nvPicPr>
+          <p:cNvPr id="5" name="Picture 4" descr="Semi-Log and Log-Log Graphs | nool">
+            <a:extLst>
+              <a:ext uri="{FF2B5EF4-FFF2-40B4-BE49-F238E27FC236}">
+                <a16:creationId xmlns:a16="http://schemas.microsoft.com/office/drawing/2014/main" id="{4F1B2239-67E1-7D6F-CE7F-3C2BD2DD5B75}"/>
+              </a:ext>
+            </a:extLst>
+          </p:cNvPr>
+          <p:cNvPicPr>
+            <a:picLocks noChangeAspect="1"/>
+          </p:cNvPicPr>
+          <p:nvPr/>
+        </p:nvPicPr>
+        <p:blipFill>
+          <a:blip r:embed="rId3"/>
+          <a:stretch>
+            <a:fillRect/>
+          </a:stretch>
+        </p:blipFill>
+        <p:spPr>
+          <a:xfrm>
+            <a:off x="7035800" y="4116856"/>
+            <a:ext cx="5080720" cy="2741144"/>
+          </a:xfrm>
+          <a:prstGeom prst="rect">
+            <a:avLst/>
+          </a:prstGeom>
+        </p:spPr>
+      </p:pic>
+    </p:spTree>
+    <p:extLst>
+      <p:ext uri="{BB962C8B-B14F-4D97-AF65-F5344CB8AC3E}">
+        <p14:creationId xmlns:p14="http://schemas.microsoft.com/office/powerpoint/2010/main" val="2765642360"/>
+      </p:ext>
+    </p:extLst>
+  </p:cSld>
+  <p:clrMapOvr>
+    <a:masterClrMapping/>
+  </p:clrMapOvr>
+</p:sld>
+</file>
+
+<file path=ppt/slides/slide11.xml><?xml version="1.0" encoding="utf-8"?>
+<p:sld xmlns:a="http://schemas.openxmlformats.org/drawingml/2006/main" xmlns:r="http://schemas.openxmlformats.org/officeDocument/2006/relationships" xmlns:p="http://schemas.openxmlformats.org/presentationml/2006/main">
+  <p:cSld>
+    <p:spTree>
+      <p:nvGrpSpPr>
+        <p:cNvPr id="1" name=""/>
+        <p:cNvGrpSpPr/>
+        <p:nvPr/>
+      </p:nvGrpSpPr>
+      <p:grpSpPr>
+        <a:xfrm>
+          <a:off x="0" y="0"/>
+          <a:ext cx="0" cy="0"/>
+          <a:chOff x="0" y="0"/>
+          <a:chExt cx="0" cy="0"/>
+        </a:xfrm>
+      </p:grpSpPr>
+      <p:sp>
+        <p:nvSpPr>
+          <p:cNvPr id="2" name="Title 1">
+            <a:extLst>
+              <a:ext uri="{FF2B5EF4-FFF2-40B4-BE49-F238E27FC236}">
+                <a16:creationId xmlns:a16="http://schemas.microsoft.com/office/drawing/2014/main" id="{4E249C16-A9FA-DE69-A0DE-6ECF48B20C50}"/>
+              </a:ext>
+            </a:extLst>
+          </p:cNvPr>
+          <p:cNvSpPr>
+            <a:spLocks noGrp="1"/>
+          </p:cNvSpPr>
+          <p:nvPr>
+            <p:ph type="title"/>
+          </p:nvPr>
+        </p:nvSpPr>
+        <p:spPr/>
+        <p:txBody>
+          <a:bodyPr/>
+          <a:lstStyle/>
+          <a:p>
+            <a:r>
+              <a:rPr lang="en-US" dirty="0"/>
+              <a:t>Poisson</a:t>
+            </a:r>
+          </a:p>
+        </p:txBody>
+      </p:sp>
+      <p:sp>
+        <p:nvSpPr>
+          <p:cNvPr id="3" name="Content Placeholder 2">
+            <a:extLst>
+              <a:ext uri="{FF2B5EF4-FFF2-40B4-BE49-F238E27FC236}">
+                <a16:creationId xmlns:a16="http://schemas.microsoft.com/office/drawing/2014/main" id="{2EF0A084-C1A5-5CC9-C3F6-B61FDC6ED950}"/>
+              </a:ext>
+            </a:extLst>
+          </p:cNvPr>
+          <p:cNvSpPr>
+            <a:spLocks noGrp="1"/>
+          </p:cNvSpPr>
+          <p:nvPr>
+            <p:ph idx="1"/>
+          </p:nvPr>
+        </p:nvSpPr>
+        <p:spPr>
+          <a:xfrm>
+            <a:off x="4432300" y="1988288"/>
+            <a:ext cx="7759700" cy="4065193"/>
+          </a:xfrm>
+        </p:spPr>
+        <p:txBody>
+          <a:bodyPr/>
+          <a:lstStyle/>
+          <a:p>
+            <a:r>
+              <a:rPr lang="en-US" dirty="0"/>
+              <a:t>Poisson distributions discreet distributions, commonly used for things like number of customers or goals in a game. </a:t>
+            </a:r>
+          </a:p>
+          <a:p>
+            <a:pPr lvl="1"/>
+            <a:r>
+              <a:rPr lang="en-US" dirty="0"/>
+              <a:t>Only takes on discreet values.</a:t>
+            </a:r>
+          </a:p>
+          <a:p>
+            <a:pPr lvl="1"/>
+            <a:r>
+              <a:rPr lang="en-US" dirty="0"/>
+              <a:t>No fit function, we have to do it by hand. </a:t>
+            </a:r>
+          </a:p>
+          <a:p>
+            <a:r>
+              <a:rPr lang="en-US" dirty="0"/>
+              <a:t>Defined by:</a:t>
+            </a:r>
+          </a:p>
+          <a:p>
+            <a:pPr lvl="1"/>
+            <a:r>
+              <a:rPr lang="en-US" dirty="0"/>
+              <a:t>Mean: mu. </a:t>
+            </a:r>
+          </a:p>
+          <a:p>
+            <a:r>
+              <a:rPr lang="en-US" dirty="0" err="1"/>
+              <a:t>Scipy</a:t>
+            </a:r>
+            <a:r>
+              <a:rPr lang="en-US" dirty="0"/>
+              <a:t> Parameters:</a:t>
+            </a:r>
+          </a:p>
+          <a:p>
+            <a:pPr lvl="1"/>
+            <a:r>
+              <a:rPr lang="en-US" dirty="0"/>
+              <a:t>Mu. </a:t>
+            </a:r>
+          </a:p>
+        </p:txBody>
+      </p:sp>
+      <p:pic>
+        <p:nvPicPr>
+          <p:cNvPr id="4" name="Picture 3" descr="numpy.random.Generator.poisson — NumPy v2.1 Manual">
+            <a:extLst>
+              <a:ext uri="{FF2B5EF4-FFF2-40B4-BE49-F238E27FC236}">
+                <a16:creationId xmlns:a16="http://schemas.microsoft.com/office/drawing/2014/main" id="{91E67948-5DF4-AAB8-D5A8-D3FEBDDDCB4E}"/>
+              </a:ext>
+            </a:extLst>
+          </p:cNvPr>
+          <p:cNvPicPr>
+            <a:picLocks noChangeAspect="1"/>
+          </p:cNvPicPr>
+          <p:nvPr/>
+        </p:nvPicPr>
+        <p:blipFill>
+          <a:blip r:embed="rId2"/>
+          <a:stretch>
+            <a:fillRect/>
+          </a:stretch>
+        </p:blipFill>
+        <p:spPr>
+          <a:xfrm>
+            <a:off x="0" y="2369438"/>
+            <a:ext cx="4432300" cy="2743200"/>
+          </a:xfrm>
+          <a:prstGeom prst="rect">
+            <a:avLst/>
+          </a:prstGeom>
+        </p:spPr>
+      </p:pic>
+    </p:spTree>
+    <p:extLst>
+      <p:ext uri="{BB962C8B-B14F-4D97-AF65-F5344CB8AC3E}">
+        <p14:creationId xmlns:p14="http://schemas.microsoft.com/office/powerpoint/2010/main" val="1330304381"/>
+      </p:ext>
+    </p:extLst>
+  </p:cSld>
+  <p:clrMapOvr>
+    <a:masterClrMapping/>
+  </p:clrMapOvr>
+</p:sld>
+</file>
+
+<file path=ppt/slides/slide12.xml><?xml version="1.0" encoding="utf-8"?>
+<p:sld xmlns:a="http://schemas.openxmlformats.org/drawingml/2006/main" xmlns:r="http://schemas.openxmlformats.org/officeDocument/2006/relationships" xmlns:p="http://schemas.openxmlformats.org/presentationml/2006/main">
+  <p:cSld>
+    <p:spTree>
+      <p:nvGrpSpPr>
+        <p:cNvPr id="1" name=""/>
+        <p:cNvGrpSpPr/>
+        <p:nvPr/>
+      </p:nvGrpSpPr>
+      <p:grpSpPr>
+        <a:xfrm>
+          <a:off x="0" y="0"/>
+          <a:ext cx="0" cy="0"/>
+          <a:chOff x="0" y="0"/>
+          <a:chExt cx="0" cy="0"/>
+        </a:xfrm>
+      </p:grpSpPr>
+      <p:sp>
+        <p:nvSpPr>
+          <p:cNvPr id="2" name="Title 1">
+            <a:extLst>
+              <a:ext uri="{FF2B5EF4-FFF2-40B4-BE49-F238E27FC236}">
+                <a16:creationId xmlns:a16="http://schemas.microsoft.com/office/drawing/2014/main" id="{C65CC9A1-338D-EBD3-DD10-42AE617BFF7C}"/>
+              </a:ext>
+            </a:extLst>
+          </p:cNvPr>
+          <p:cNvSpPr>
+            <a:spLocks noGrp="1"/>
+          </p:cNvSpPr>
+          <p:nvPr>
+            <p:ph type="title"/>
+          </p:nvPr>
+        </p:nvSpPr>
+        <p:spPr/>
+        <p:txBody>
+          <a:bodyPr/>
+          <a:lstStyle/>
+          <a:p>
+            <a:r>
+              <a:rPr lang="en-US" dirty="0"/>
+              <a:t>Beta</a:t>
+            </a:r>
+          </a:p>
+        </p:txBody>
+      </p:sp>
+      <p:sp>
+        <p:nvSpPr>
+          <p:cNvPr id="3" name="Content Placeholder 2">
+            <a:extLst>
+              <a:ext uri="{FF2B5EF4-FFF2-40B4-BE49-F238E27FC236}">
+                <a16:creationId xmlns:a16="http://schemas.microsoft.com/office/drawing/2014/main" id="{F53F96B1-DD96-78E0-AA4D-3406E150ACD7}"/>
+              </a:ext>
+            </a:extLst>
+          </p:cNvPr>
+          <p:cNvSpPr>
+            <a:spLocks noGrp="1"/>
+          </p:cNvSpPr>
+          <p:nvPr>
+            <p:ph idx="1"/>
+          </p:nvPr>
+        </p:nvSpPr>
+        <p:spPr>
+          <a:xfrm>
+            <a:off x="1451580" y="2015732"/>
+            <a:ext cx="6001604" cy="3450613"/>
+          </a:xfrm>
+        </p:spPr>
+        <p:txBody>
+          <a:bodyPr/>
+          <a:lstStyle/>
+          <a:p>
+            <a:r>
+              <a:rPr lang="en-US" dirty="0"/>
+              <a:t>Beta distributions are continuous distributions that can take on many shapes. </a:t>
+            </a:r>
+          </a:p>
+          <a:p>
+            <a:pPr lvl="1"/>
+            <a:r>
+              <a:rPr lang="en-US" dirty="0"/>
+              <a:t>We need to fit it to get good results. </a:t>
+            </a:r>
+          </a:p>
+          <a:p>
+            <a:r>
+              <a:rPr lang="en-US" dirty="0"/>
+              <a:t>Defined by:</a:t>
+            </a:r>
+          </a:p>
+          <a:p>
+            <a:pPr lvl="1"/>
+            <a:r>
+              <a:rPr lang="en-US" dirty="0" err="1"/>
+              <a:t>A,b</a:t>
+            </a:r>
+            <a:r>
+              <a:rPr lang="en-US" dirty="0"/>
+              <a:t>: shape parameters. </a:t>
+            </a:r>
+          </a:p>
+          <a:p>
+            <a:r>
+              <a:rPr lang="en-US" dirty="0" err="1"/>
+              <a:t>Scipy</a:t>
+            </a:r>
+            <a:r>
+              <a:rPr lang="en-US" dirty="0"/>
+              <a:t> parameters:</a:t>
+            </a:r>
+          </a:p>
+          <a:p>
+            <a:pPr lvl="1"/>
+            <a:r>
+              <a:rPr lang="en-US" dirty="0"/>
+              <a:t>Use fit, we can’t calculate them practically. </a:t>
+            </a:r>
+          </a:p>
+        </p:txBody>
+      </p:sp>
+      <p:pic>
+        <p:nvPicPr>
+          <p:cNvPr id="4" name="Picture 3" descr="Persuasive Python - 6 Plausibility, The Beta Distribution, and Its Visualization">
+            <a:extLst>
+              <a:ext uri="{FF2B5EF4-FFF2-40B4-BE49-F238E27FC236}">
+                <a16:creationId xmlns:a16="http://schemas.microsoft.com/office/drawing/2014/main" id="{40F9D71C-4C90-E199-960C-8F35B8F03B8B}"/>
+              </a:ext>
+            </a:extLst>
+          </p:cNvPr>
+          <p:cNvPicPr>
+            <a:picLocks noChangeAspect="1"/>
+          </p:cNvPicPr>
+          <p:nvPr/>
+        </p:nvPicPr>
+        <p:blipFill>
+          <a:blip r:embed="rId2"/>
+          <a:srcRect l="24599" r="26045"/>
+          <a:stretch>
+            <a:fillRect/>
+          </a:stretch>
+        </p:blipFill>
+        <p:spPr>
+          <a:xfrm>
+            <a:off x="7453183" y="0"/>
+            <a:ext cx="4738817" cy="6858000"/>
+          </a:xfrm>
+          <a:prstGeom prst="rect">
+            <a:avLst/>
+          </a:prstGeom>
+        </p:spPr>
+      </p:pic>
+    </p:spTree>
+    <p:extLst>
+      <p:ext uri="{BB962C8B-B14F-4D97-AF65-F5344CB8AC3E}">
+        <p14:creationId xmlns:p14="http://schemas.microsoft.com/office/powerpoint/2010/main" val="3989570239"/>
+      </p:ext>
+    </p:extLst>
+  </p:cSld>
+  <p:clrMapOvr>
+    <a:masterClrMapping/>
+  </p:clrMapOvr>
+</p:sld>
+</file>
+
+<file path=ppt/slides/slide13.xml><?xml version="1.0" encoding="utf-8"?>
+<p:sld xmlns:a="http://schemas.openxmlformats.org/drawingml/2006/main" xmlns:r="http://schemas.openxmlformats.org/officeDocument/2006/relationships" xmlns:p="http://schemas.openxmlformats.org/presentationml/2006/main">
+  <p:cSld>
+    <p:spTree>
+      <p:nvGrpSpPr>
+        <p:cNvPr id="1" name=""/>
+        <p:cNvGrpSpPr/>
+        <p:nvPr/>
+      </p:nvGrpSpPr>
+      <p:grpSpPr>
+        <a:xfrm>
+          <a:off x="0" y="0"/>
+          <a:ext cx="0" cy="0"/>
+          <a:chOff x="0" y="0"/>
+          <a:chExt cx="0" cy="0"/>
+        </a:xfrm>
+      </p:grpSpPr>
+      <p:sp>
+        <p:nvSpPr>
+          <p:cNvPr id="2" name="Title 1">
+            <a:extLst>
+              <a:ext uri="{FF2B5EF4-FFF2-40B4-BE49-F238E27FC236}">
+                <a16:creationId xmlns:a16="http://schemas.microsoft.com/office/drawing/2014/main" id="{23D88A13-952A-9CB2-E744-78592AD9DE76}"/>
+              </a:ext>
+            </a:extLst>
+          </p:cNvPr>
+          <p:cNvSpPr>
+            <a:spLocks noGrp="1"/>
+          </p:cNvSpPr>
+          <p:nvPr>
+            <p:ph type="title"/>
+          </p:nvPr>
+        </p:nvSpPr>
+        <p:spPr/>
+        <p:txBody>
+          <a:bodyPr/>
+          <a:lstStyle/>
+          <a:p>
+            <a:r>
+              <a:rPr lang="en-US" dirty="0"/>
+              <a:t>Gamma</a:t>
+            </a:r>
+          </a:p>
+        </p:txBody>
+      </p:sp>
+      <p:sp>
+        <p:nvSpPr>
+          <p:cNvPr id="3" name="Content Placeholder 2">
+            <a:extLst>
+              <a:ext uri="{FF2B5EF4-FFF2-40B4-BE49-F238E27FC236}">
+                <a16:creationId xmlns:a16="http://schemas.microsoft.com/office/drawing/2014/main" id="{F7A1E6A8-9CCC-2259-9A5A-621ACEE60347}"/>
+              </a:ext>
+            </a:extLst>
+          </p:cNvPr>
+          <p:cNvSpPr>
+            <a:spLocks noGrp="1"/>
+          </p:cNvSpPr>
+          <p:nvPr>
+            <p:ph idx="1"/>
+          </p:nvPr>
+        </p:nvSpPr>
+        <p:spPr>
+          <a:xfrm>
+            <a:off x="4432300" y="2015732"/>
+            <a:ext cx="6622554" cy="3450613"/>
+          </a:xfrm>
+        </p:spPr>
+        <p:txBody>
+          <a:bodyPr/>
+          <a:lstStyle/>
+          <a:p>
+            <a:r>
+              <a:rPr lang="en-US" dirty="0"/>
+              <a:t>Gamma is a continuous model commonly used for things like wait times or customer counts. </a:t>
+            </a:r>
+          </a:p>
+          <a:p>
+            <a:r>
+              <a:rPr lang="en-US" dirty="0"/>
+              <a:t>Defined by:</a:t>
+            </a:r>
+          </a:p>
+          <a:p>
+            <a:pPr lvl="1"/>
+            <a:r>
+              <a:rPr lang="en-US" dirty="0"/>
+              <a:t>A: shape parameter. </a:t>
+            </a:r>
+          </a:p>
+          <a:p>
+            <a:r>
+              <a:rPr lang="en-US" dirty="0" err="1"/>
+              <a:t>Scipy</a:t>
+            </a:r>
+            <a:r>
+              <a:rPr lang="en-US" dirty="0"/>
+              <a:t> parameters:</a:t>
+            </a:r>
+          </a:p>
+          <a:p>
+            <a:pPr lvl="1"/>
+            <a:r>
+              <a:rPr lang="en-US" dirty="0"/>
+              <a:t>Use fit, unrealistic to calculate. </a:t>
+            </a:r>
+          </a:p>
+        </p:txBody>
+      </p:sp>
+      <p:pic>
+        <p:nvPicPr>
+          <p:cNvPr id="4" name="Picture 3" descr="numpy.random.gamma — NumPy v2.1 Manual">
+            <a:extLst>
+              <a:ext uri="{FF2B5EF4-FFF2-40B4-BE49-F238E27FC236}">
+                <a16:creationId xmlns:a16="http://schemas.microsoft.com/office/drawing/2014/main" id="{07FCD79E-E17E-E525-9977-12A906289872}"/>
+              </a:ext>
+            </a:extLst>
+          </p:cNvPr>
+          <p:cNvPicPr>
+            <a:picLocks noChangeAspect="1"/>
+          </p:cNvPicPr>
+          <p:nvPr/>
+        </p:nvPicPr>
+        <p:blipFill>
+          <a:blip r:embed="rId2"/>
+          <a:stretch>
+            <a:fillRect/>
+          </a:stretch>
+        </p:blipFill>
+        <p:spPr>
+          <a:xfrm>
+            <a:off x="0" y="2369438"/>
+            <a:ext cx="4432300" cy="2743200"/>
+          </a:xfrm>
+          <a:prstGeom prst="rect">
+            <a:avLst/>
+          </a:prstGeom>
+        </p:spPr>
+      </p:pic>
+    </p:spTree>
+    <p:extLst>
+      <p:ext uri="{BB962C8B-B14F-4D97-AF65-F5344CB8AC3E}">
+        <p14:creationId xmlns:p14="http://schemas.microsoft.com/office/powerpoint/2010/main" val="754147325"/>
+      </p:ext>
+    </p:extLst>
+  </p:cSld>
+  <p:clrMapOvr>
+    <a:masterClrMapping/>
+  </p:clrMapOvr>
+</p:sld>
+</file>
+
+<file path=ppt/slides/slide14.xml><?xml version="1.0" encoding="utf-8"?>
+<p:sld xmlns:a="http://schemas.openxmlformats.org/drawingml/2006/main" xmlns:r="http://schemas.openxmlformats.org/officeDocument/2006/relationships" xmlns:p="http://schemas.openxmlformats.org/presentationml/2006/main">
+  <p:cSld>
+    <p:spTree>
+      <p:nvGrpSpPr>
+        <p:cNvPr id="1" name=""/>
+        <p:cNvGrpSpPr/>
+        <p:nvPr/>
+      </p:nvGrpSpPr>
+      <p:grpSpPr>
+        <a:xfrm>
+          <a:off x="0" y="0"/>
+          <a:ext cx="0" cy="0"/>
+          <a:chOff x="0" y="0"/>
+          <a:chExt cx="0" cy="0"/>
+        </a:xfrm>
+      </p:grpSpPr>
+      <p:sp>
+        <p:nvSpPr>
+          <p:cNvPr id="2" name="Title 1">
+            <a:extLst>
+              <a:ext uri="{FF2B5EF4-FFF2-40B4-BE49-F238E27FC236}">
+                <a16:creationId xmlns:a16="http://schemas.microsoft.com/office/drawing/2014/main" id="{F598750C-96E2-0C48-8873-0B789072727F}"/>
+              </a:ext>
+            </a:extLst>
+          </p:cNvPr>
+          <p:cNvSpPr>
+            <a:spLocks noGrp="1"/>
+          </p:cNvSpPr>
+          <p:nvPr>
+            <p:ph type="title"/>
+          </p:nvPr>
+        </p:nvSpPr>
+        <p:spPr/>
+        <p:txBody>
+          <a:bodyPr/>
+          <a:lstStyle/>
+          <a:p>
+            <a:r>
+              <a:rPr lang="en-US" dirty="0"/>
+              <a:t>Using </a:t>
+            </a:r>
+            <a:r>
+              <a:rPr lang="en-US" dirty="0" err="1"/>
+              <a:t>Scipy</a:t>
+            </a:r>
+            <a:r>
+              <a:rPr lang="en-US" dirty="0"/>
+              <a:t> Distributions</a:t>
+            </a:r>
+          </a:p>
+        </p:txBody>
+      </p:sp>
+      <p:sp>
+        <p:nvSpPr>
+          <p:cNvPr id="3" name="Content Placeholder 2">
+            <a:extLst>
+              <a:ext uri="{FF2B5EF4-FFF2-40B4-BE49-F238E27FC236}">
+                <a16:creationId xmlns:a16="http://schemas.microsoft.com/office/drawing/2014/main" id="{A57FD357-7C98-A62F-C844-459B7A82F2E0}"/>
+              </a:ext>
+            </a:extLst>
+          </p:cNvPr>
+          <p:cNvSpPr>
+            <a:spLocks noGrp="1"/>
+          </p:cNvSpPr>
+          <p:nvPr>
+            <p:ph idx="1"/>
+          </p:nvPr>
+        </p:nvSpPr>
+        <p:spPr>
+          <a:xfrm>
+            <a:off x="1451579" y="2015732"/>
+            <a:ext cx="9603275" cy="4037749"/>
+          </a:xfrm>
+        </p:spPr>
+        <p:txBody>
+          <a:bodyPr/>
+          <a:lstStyle/>
+          <a:p>
+            <a:r>
+              <a:rPr lang="en-US" dirty="0"/>
+              <a:t>We can calculate almost any distribution related stuff once one exists:</a:t>
+            </a:r>
+          </a:p>
+          <a:p>
+            <a:pPr lvl="1"/>
+            <a:r>
+              <a:rPr lang="en-US" dirty="0" err="1"/>
+              <a:t>Rvs</a:t>
+            </a:r>
+            <a:r>
+              <a:rPr lang="en-US" dirty="0"/>
+              <a:t> – generate a sample following this distribution. We’ll use this lots soon. </a:t>
+            </a:r>
+          </a:p>
+          <a:p>
+            <a:pPr lvl="1"/>
+            <a:r>
+              <a:rPr lang="en-US" dirty="0" err="1"/>
+              <a:t>Cdf</a:t>
+            </a:r>
+            <a:r>
+              <a:rPr lang="en-US" dirty="0"/>
+              <a:t> – cumulative calculation for percentile rank.  </a:t>
+            </a:r>
+          </a:p>
+          <a:p>
+            <a:pPr lvl="1"/>
+            <a:r>
+              <a:rPr lang="en-US" dirty="0" err="1"/>
+              <a:t>Ppf</a:t>
+            </a:r>
+            <a:r>
+              <a:rPr lang="en-US" dirty="0"/>
+              <a:t> – cumulative calculation for percentile. </a:t>
+            </a:r>
+          </a:p>
+          <a:p>
+            <a:pPr lvl="1"/>
+            <a:r>
+              <a:rPr lang="en-US" dirty="0"/>
+              <a:t>Pdf/</a:t>
+            </a:r>
+            <a:r>
+              <a:rPr lang="en-US" dirty="0" err="1"/>
+              <a:t>pmf</a:t>
+            </a:r>
+            <a:r>
+              <a:rPr lang="en-US" dirty="0"/>
+              <a:t> – probability of having *this* value. </a:t>
+            </a:r>
+          </a:p>
+          <a:p>
+            <a:r>
+              <a:rPr lang="en-US" dirty="0"/>
+              <a:t>Model is representation of empirical distribution. </a:t>
+            </a:r>
+          </a:p>
+          <a:p>
+            <a:pPr lvl="1"/>
+            <a:r>
+              <a:rPr lang="en-US" dirty="0"/>
+              <a:t>Anything we do should respond like real data. </a:t>
+            </a:r>
+          </a:p>
+          <a:p>
+            <a:pPr lvl="1"/>
+            <a:endParaRPr lang="en-US" dirty="0"/>
+          </a:p>
+        </p:txBody>
+      </p:sp>
+      <p:pic>
+        <p:nvPicPr>
+          <p:cNvPr id="4" name="Picture 3" descr="Complete Guide to Python SciPy Norm for Data Science and Statistics">
+            <a:extLst>
+              <a:ext uri="{FF2B5EF4-FFF2-40B4-BE49-F238E27FC236}">
+                <a16:creationId xmlns:a16="http://schemas.microsoft.com/office/drawing/2014/main" id="{7FC131FD-7DC8-5C89-D5B8-166762681410}"/>
+              </a:ext>
+            </a:extLst>
+          </p:cNvPr>
+          <p:cNvPicPr>
+            <a:picLocks noChangeAspect="1"/>
+          </p:cNvPicPr>
+          <p:nvPr/>
+        </p:nvPicPr>
+        <p:blipFill>
+          <a:blip r:embed="rId2"/>
+          <a:stretch>
+            <a:fillRect/>
+          </a:stretch>
+        </p:blipFill>
+        <p:spPr>
+          <a:xfrm>
+            <a:off x="7636476" y="2899692"/>
+            <a:ext cx="4555524" cy="3877990"/>
+          </a:xfrm>
+          <a:prstGeom prst="rect">
+            <a:avLst/>
+          </a:prstGeom>
+        </p:spPr>
+      </p:pic>
+    </p:spTree>
+    <p:extLst>
+      <p:ext uri="{BB962C8B-B14F-4D97-AF65-F5344CB8AC3E}">
+        <p14:creationId xmlns:p14="http://schemas.microsoft.com/office/powerpoint/2010/main" val="2429767256"/>
+      </p:ext>
+    </p:extLst>
+  </p:cSld>
+  <p:clrMapOvr>
+    <a:masterClrMapping/>
+  </p:clrMapOvr>
+</p:sld>
+</file>
+
+<file path=ppt/slides/slide15.xml><?xml version="1.0" encoding="utf-8"?>
+<p:sld xmlns:a="http://schemas.openxmlformats.org/drawingml/2006/main" xmlns:r="http://schemas.openxmlformats.org/officeDocument/2006/relationships" xmlns:p="http://schemas.openxmlformats.org/presentationml/2006/main" show="0">
+  <p:cSld>
+    <p:spTree>
+      <p:nvGrpSpPr>
+        <p:cNvPr id="1" name=""/>
+        <p:cNvGrpSpPr/>
+        <p:nvPr/>
+      </p:nvGrpSpPr>
+      <p:grpSpPr>
+        <a:xfrm>
+          <a:off x="0" y="0"/>
+          <a:ext cx="0" cy="0"/>
+          <a:chOff x="0" y="0"/>
+          <a:chExt cx="0" cy="0"/>
+        </a:xfrm>
+      </p:grpSpPr>
+      <p:sp>
+        <p:nvSpPr>
+          <p:cNvPr id="2" name="Title 1">
+            <a:extLst>
+              <a:ext uri="{FF2B5EF4-FFF2-40B4-BE49-F238E27FC236}">
+                <a16:creationId xmlns:a16="http://schemas.microsoft.com/office/drawing/2014/main" id="{6765325C-EE39-B877-634F-A492E743212C}"/>
+              </a:ext>
+            </a:extLst>
+          </p:cNvPr>
+          <p:cNvSpPr>
+            <a:spLocks noGrp="1"/>
+          </p:cNvSpPr>
+          <p:nvPr>
+            <p:ph type="title"/>
+          </p:nvPr>
+        </p:nvSpPr>
+        <p:spPr/>
+        <p:txBody>
+          <a:bodyPr/>
+          <a:lstStyle/>
+          <a:p>
+            <a:r>
+              <a:rPr lang="en-US" dirty="0"/>
+              <a:t>Distributions to Models</a:t>
+            </a:r>
+          </a:p>
+        </p:txBody>
+      </p:sp>
+      <p:sp>
+        <p:nvSpPr>
+          <p:cNvPr id="3" name="Content Placeholder 2">
+            <a:extLst>
+              <a:ext uri="{FF2B5EF4-FFF2-40B4-BE49-F238E27FC236}">
+                <a16:creationId xmlns:a16="http://schemas.microsoft.com/office/drawing/2014/main" id="{77EA71B4-0CC6-C674-C9D5-BDF97E76C5F5}"/>
+              </a:ext>
+            </a:extLst>
+          </p:cNvPr>
+          <p:cNvSpPr>
+            <a:spLocks noGrp="1"/>
+          </p:cNvSpPr>
+          <p:nvPr>
+            <p:ph idx="1"/>
+          </p:nvPr>
+        </p:nvSpPr>
+        <p:spPr/>
+        <p:txBody>
+          <a:bodyPr/>
+          <a:lstStyle/>
+          <a:p>
+            <a:r>
+              <a:rPr lang="en-US" dirty="0"/>
+              <a:t>These models are all </a:t>
+            </a:r>
+          </a:p>
+        </p:txBody>
+      </p:sp>
+    </p:spTree>
+    <p:extLst>
+      <p:ext uri="{BB962C8B-B14F-4D97-AF65-F5344CB8AC3E}">
+        <p14:creationId xmlns:p14="http://schemas.microsoft.com/office/powerpoint/2010/main" val="1589942131"/>
+      </p:ext>
+    </p:extLst>
+  </p:cSld>
+  <p:clrMapOvr>
+    <a:masterClrMapping/>
+  </p:clrMapOvr>
+</p:sld>
+</file>
+
+<file path=ppt/slides/slide16.xml><?xml version="1.0" encoding="utf-8"?>
+<p:sld xmlns:a="http://schemas.openxmlformats.org/drawingml/2006/main" xmlns:r="http://schemas.openxmlformats.org/officeDocument/2006/relationships" xmlns:p="http://schemas.openxmlformats.org/presentationml/2006/main">
+  <p:cSld>
+    <p:spTree>
+      <p:nvGrpSpPr>
+        <p:cNvPr id="1" name=""/>
+        <p:cNvGrpSpPr/>
+        <p:nvPr/>
+      </p:nvGrpSpPr>
+      <p:grpSpPr>
+        <a:xfrm>
+          <a:off x="0" y="0"/>
+          <a:ext cx="0" cy="0"/>
+          <a:chOff x="0" y="0"/>
+          <a:chExt cx="0" cy="0"/>
+        </a:xfrm>
+      </p:grpSpPr>
+      <p:sp>
+        <p:nvSpPr>
+          <p:cNvPr id="2" name="Title 1">
+            <a:extLst>
+              <a:ext uri="{FF2B5EF4-FFF2-40B4-BE49-F238E27FC236}">
+                <a16:creationId xmlns:a16="http://schemas.microsoft.com/office/drawing/2014/main" id="{BE2159A9-5AE7-DACB-29F8-7E5457C8227D}"/>
+              </a:ext>
+            </a:extLst>
+          </p:cNvPr>
+          <p:cNvSpPr>
+            <a:spLocks noGrp="1"/>
+          </p:cNvSpPr>
+          <p:nvPr>
+            <p:ph type="title"/>
+          </p:nvPr>
+        </p:nvSpPr>
+        <p:spPr/>
+        <p:txBody>
+          <a:bodyPr/>
+          <a:lstStyle/>
+          <a:p>
+            <a:r>
+              <a:rPr lang="en-US" dirty="0"/>
+              <a:t>Key concepts</a:t>
+            </a:r>
+          </a:p>
+        </p:txBody>
+      </p:sp>
+      <p:sp>
+        <p:nvSpPr>
+          <p:cNvPr id="3" name="Content Placeholder 2">
+            <a:extLst>
+              <a:ext uri="{FF2B5EF4-FFF2-40B4-BE49-F238E27FC236}">
+                <a16:creationId xmlns:a16="http://schemas.microsoft.com/office/drawing/2014/main" id="{2330B900-F549-EE0D-D983-71D4390F4B6F}"/>
+              </a:ext>
+            </a:extLst>
+          </p:cNvPr>
+          <p:cNvSpPr>
+            <a:spLocks noGrp="1"/>
+          </p:cNvSpPr>
+          <p:nvPr>
+            <p:ph idx="1"/>
+          </p:nvPr>
+        </p:nvSpPr>
+        <p:spPr>
+          <a:xfrm>
+            <a:off x="1451579" y="1853754"/>
+            <a:ext cx="9603275" cy="4199727"/>
+          </a:xfrm>
+        </p:spPr>
+        <p:txBody>
+          <a:bodyPr/>
+          <a:lstStyle/>
+          <a:p>
+            <a:r>
+              <a:rPr lang="en-US" dirty="0"/>
+              <a:t>We can match empirical to analytical with charts and/or calculations. </a:t>
+            </a:r>
+          </a:p>
+          <a:p>
+            <a:r>
+              <a:rPr lang="en-US" dirty="0"/>
+              <a:t>Once the analytical is established, we know the expected shape of population data. </a:t>
+            </a:r>
+          </a:p>
+          <a:p>
+            <a:pPr lvl="1"/>
+            <a:r>
+              <a:rPr lang="en-US" dirty="0"/>
+              <a:t>We can calculate the mean and std (or other values) that define the shape. </a:t>
+            </a:r>
+          </a:p>
+          <a:p>
+            <a:r>
+              <a:rPr lang="en-US" dirty="0"/>
+              <a:t>We are making an assertion, with error – this distribution models this data well enough. </a:t>
+            </a:r>
+          </a:p>
+          <a:p>
+            <a:pPr lvl="1"/>
+            <a:r>
+              <a:rPr lang="en-US" dirty="0"/>
+              <a:t>Well enough varies, depending on application. </a:t>
+            </a:r>
+          </a:p>
+          <a:p>
+            <a:pPr lvl="1"/>
+            <a:r>
+              <a:rPr lang="en-US" dirty="0"/>
+              <a:t>More representative and larger samples mean less error introduced. </a:t>
+            </a:r>
+          </a:p>
+          <a:p>
+            <a:r>
+              <a:rPr lang="en-US" dirty="0"/>
+              <a:t>In practice, in code, the analytical distribution is a source of new values. </a:t>
+            </a:r>
+          </a:p>
+          <a:p>
+            <a:pPr lvl="1"/>
+            <a:r>
+              <a:rPr lang="en-US" dirty="0"/>
+              <a:t>We can generate samples that match the distribution. </a:t>
+            </a:r>
+          </a:p>
+          <a:p>
+            <a:pPr lvl="1"/>
+            <a:r>
+              <a:rPr lang="en-US" dirty="0"/>
+              <a:t>We can use these to test or generalize. </a:t>
+            </a:r>
+          </a:p>
+        </p:txBody>
+      </p:sp>
+    </p:spTree>
+    <p:extLst>
+      <p:ext uri="{BB962C8B-B14F-4D97-AF65-F5344CB8AC3E}">
+        <p14:creationId xmlns:p14="http://schemas.microsoft.com/office/powerpoint/2010/main" val="2287542625"/>
       </p:ext>
     </p:extLst>
   </p:cSld>
@@ -4404,12 +5599,14 @@
         </p:nvSpPr>
         <p:spPr>
           <a:xfrm>
-            <a:off x="5017682" y="2015732"/>
-            <a:ext cx="6990704" cy="4037749"/>
-          </a:xfrm>
-        </p:spPr>
-        <p:txBody>
-          <a:bodyPr/>
+            <a:off x="5884770" y="1853754"/>
+            <a:ext cx="6123616" cy="4199727"/>
+          </a:xfrm>
+        </p:spPr>
+        <p:txBody>
+          <a:bodyPr>
+            <a:normAutofit/>
+          </a:bodyPr>
           <a:lstStyle/>
           <a:p>
             <a:r>
@@ -4426,19 +5623,20 @@
           <a:p>
             <a:r>
               <a:rPr lang="en-US" dirty="0"/>
-              <a:t>Can we reject the null hypothesis – the data is normal. </a:t>
-            </a:r>
-          </a:p>
-          <a:p>
-            <a:r>
-              <a:rPr lang="en-US" dirty="0"/>
-              <a:t>If our p value (confidence) is less than .05 (generally), reject it. </a:t>
+              <a:t>Null hypothesis – the data is normal. </a:t>
             </a:r>
           </a:p>
           <a:p>
             <a:pPr lvl="1"/>
             <a:r>
               <a:rPr lang="en-US" dirty="0"/>
+              <a:t>If p value (confidence) is than .05 (generally), reject it. </a:t>
+            </a:r>
+          </a:p>
+          <a:p>
+            <a:pPr lvl="1"/>
+            <a:r>
+              <a:rPr lang="en-US" dirty="0"/>
               <a:t>I.e. Data is not normal. </a:t>
             </a:r>
           </a:p>
@@ -4452,56 +5650,39 @@
           <a:p>
             <a:r>
               <a:rPr lang="en-US" dirty="0"/>
-              <a:t>This isn’t better, but it is automatable. </a:t>
+              <a:t>This isn’t necessarily better, but it is automatable. </a:t>
             </a:r>
           </a:p>
         </p:txBody>
       </p:sp>
       <p:pic>
         <p:nvPicPr>
-          <p:cNvPr id="3074" name="Picture 2" descr="SPSS Kolmogorov-Smirnov Test - The Ultimate Guide">
+          <p:cNvPr id="4" name="Picture 3" descr="How to do The Shapiro-Wilk Normality Test for Biomedical Research">
             <a:extLst>
               <a:ext uri="{FF2B5EF4-FFF2-40B4-BE49-F238E27FC236}">
-                <a16:creationId xmlns:a16="http://schemas.microsoft.com/office/drawing/2014/main" id="{875D8912-9C13-1812-1A49-3934CA31FA09}"/>
+                <a16:creationId xmlns:a16="http://schemas.microsoft.com/office/drawing/2014/main" id="{0E4CF884-B175-2D83-B780-33584E509107}"/>
               </a:ext>
             </a:extLst>
           </p:cNvPr>
           <p:cNvPicPr>
-            <a:picLocks noChangeAspect="1" noChangeArrowheads="1"/>
+            <a:picLocks noChangeAspect="1"/>
           </p:cNvPicPr>
           <p:nvPr/>
         </p:nvPicPr>
         <p:blipFill>
-          <a:blip r:embed="rId2">
-            <a:extLst>
-              <a:ext uri="{28A0092B-C50C-407E-A947-70E740481C1C}">
-                <a14:useLocalDpi xmlns:a14="http://schemas.microsoft.com/office/drawing/2010/main" val="0"/>
-              </a:ext>
-            </a:extLst>
-          </a:blip>
-          <a:srcRect/>
+          <a:blip r:embed="rId2"/>
           <a:stretch>
             <a:fillRect/>
           </a:stretch>
         </p:blipFill>
-        <p:spPr bwMode="auto">
-          <a:xfrm>
-            <a:off x="0" y="2015732"/>
-            <a:ext cx="5017682" cy="2759725"/>
+        <p:spPr>
+          <a:xfrm>
+            <a:off x="0" y="1853754"/>
+            <a:ext cx="5884769" cy="3946476"/>
           </a:xfrm>
           <a:prstGeom prst="rect">
             <a:avLst/>
           </a:prstGeom>
-          <a:noFill/>
-          <a:extLst>
-            <a:ext uri="{909E8E84-426E-40DD-AFC4-6F175D3DCCD1}">
-              <a14:hiddenFill xmlns:a14="http://schemas.microsoft.com/office/drawing/2010/main">
-                <a:solidFill>
-                  <a:srgbClr val="FFFFFF"/>
-                </a:solidFill>
-              </a14:hiddenFill>
-            </a:ext>
-          </a:extLst>
         </p:spPr>
       </p:pic>
     </p:spTree>
@@ -4699,7 +5880,7 @@
           <p:cNvPr id="2" name="Title 1">
             <a:extLst>
               <a:ext uri="{FF2B5EF4-FFF2-40B4-BE49-F238E27FC236}">
-                <a16:creationId xmlns:a16="http://schemas.microsoft.com/office/drawing/2014/main" id="{BE2159A9-5AE7-DACB-29F8-7E5457C8227D}"/>
+                <a16:creationId xmlns:a16="http://schemas.microsoft.com/office/drawing/2014/main" id="{E2D039E9-7D2A-7F09-D6AF-F61EF2A9C89A}"/>
               </a:ext>
             </a:extLst>
           </p:cNvPr>
@@ -4717,7 +5898,7 @@
           <a:p>
             <a:r>
               <a:rPr lang="en-US" dirty="0"/>
-              <a:t>Key concepts</a:t>
+              <a:t>Other Distributions in (Some) Detail</a:t>
             </a:r>
           </a:p>
         </p:txBody>
@@ -4727,7 +5908,7 @@
           <p:cNvPr id="3" name="Content Placeholder 2">
             <a:extLst>
               <a:ext uri="{FF2B5EF4-FFF2-40B4-BE49-F238E27FC236}">
-                <a16:creationId xmlns:a16="http://schemas.microsoft.com/office/drawing/2014/main" id="{2330B900-F549-EE0D-D983-71D4390F4B6F}"/>
+                <a16:creationId xmlns:a16="http://schemas.microsoft.com/office/drawing/2014/main" id="{97AB484D-00F7-0B21-3ED8-883C77CFCF88}"/>
               </a:ext>
             </a:extLst>
           </p:cNvPr>
@@ -4738,80 +5919,233 @@
             <p:ph idx="1"/>
           </p:nvPr>
         </p:nvSpPr>
+        <p:spPr/>
+        <p:txBody>
+          <a:bodyPr/>
+          <a:lstStyle/>
+          <a:p>
+            <a:endParaRPr lang="en-US"/>
+          </a:p>
+        </p:txBody>
+      </p:sp>
+      <p:pic>
+        <p:nvPicPr>
+          <p:cNvPr id="4" name="Picture 3" descr="No photo description available.">
+            <a:extLst>
+              <a:ext uri="{FF2B5EF4-FFF2-40B4-BE49-F238E27FC236}">
+                <a16:creationId xmlns:a16="http://schemas.microsoft.com/office/drawing/2014/main" id="{3BD9F3EF-96C4-3309-5547-E3EFE9FAFA6F}"/>
+              </a:ext>
+            </a:extLst>
+          </p:cNvPr>
+          <p:cNvPicPr>
+            <a:picLocks noChangeAspect="1"/>
+          </p:cNvPicPr>
+          <p:nvPr/>
+        </p:nvPicPr>
+        <p:blipFill>
+          <a:blip r:embed="rId2"/>
+          <a:stretch>
+            <a:fillRect/>
+          </a:stretch>
+        </p:blipFill>
         <p:spPr>
           <a:xfrm>
-            <a:off x="1451579" y="1853754"/>
-            <a:ext cx="9603275" cy="4199727"/>
-          </a:xfrm>
-        </p:spPr>
-        <p:txBody>
-          <a:bodyPr/>
-          <a:lstStyle/>
-          <a:p>
-            <a:r>
-              <a:rPr lang="en-US" dirty="0"/>
-              <a:t>We can match empirical to analytical with charts and/or calculations. </a:t>
-            </a:r>
-          </a:p>
-          <a:p>
-            <a:r>
-              <a:rPr lang="en-US" dirty="0"/>
-              <a:t>Once the analytical is established, we know the expected shape of population data. </a:t>
-            </a:r>
-          </a:p>
-          <a:p>
-            <a:pPr lvl="1"/>
-            <a:r>
-              <a:rPr lang="en-US" dirty="0"/>
-              <a:t>We can calculate the mean and std (or other values) that define the shape. </a:t>
-            </a:r>
-          </a:p>
-          <a:p>
-            <a:r>
-              <a:rPr lang="en-US" dirty="0"/>
-              <a:t>We are making an assertion, with error – this distribution models this data well enough. </a:t>
-            </a:r>
-          </a:p>
-          <a:p>
-            <a:pPr lvl="1"/>
-            <a:r>
-              <a:rPr lang="en-US" dirty="0"/>
-              <a:t>Well enough varies, depending on application. </a:t>
-            </a:r>
-          </a:p>
-          <a:p>
-            <a:pPr lvl="1"/>
-            <a:r>
-              <a:rPr lang="en-US" dirty="0"/>
-              <a:t>More representative and larger samples mean less error introduced. </a:t>
-            </a:r>
-          </a:p>
-          <a:p>
-            <a:r>
-              <a:rPr lang="en-US" dirty="0"/>
-              <a:t>In practice, in code, the analytical distribution is a source of new values. </a:t>
-            </a:r>
-          </a:p>
-          <a:p>
-            <a:pPr lvl="1"/>
-            <a:r>
-              <a:rPr lang="en-US" dirty="0"/>
-              <a:t>We can generate samples that match the distribution. </a:t>
-            </a:r>
-          </a:p>
-          <a:p>
-            <a:pPr lvl="1"/>
-            <a:r>
-              <a:rPr lang="en-US" dirty="0"/>
-              <a:t>We can use these to test or generalize. </a:t>
-            </a:r>
-          </a:p>
-        </p:txBody>
-      </p:sp>
+            <a:off x="4192626" y="1391655"/>
+            <a:ext cx="4121180" cy="5151475"/>
+          </a:xfrm>
+          <a:prstGeom prst="rect">
+            <a:avLst/>
+          </a:prstGeom>
+        </p:spPr>
+      </p:pic>
     </p:spTree>
     <p:extLst>
       <p:ext uri="{BB962C8B-B14F-4D97-AF65-F5344CB8AC3E}">
-        <p14:creationId xmlns:p14="http://schemas.microsoft.com/office/powerpoint/2010/main" val="2287542625"/>
+        <p14:creationId xmlns:p14="http://schemas.microsoft.com/office/powerpoint/2010/main" val="4056948202"/>
+      </p:ext>
+    </p:extLst>
+  </p:cSld>
+  <p:clrMapOvr>
+    <a:masterClrMapping/>
+  </p:clrMapOvr>
+</p:sld>
+</file>
+
+<file path=ppt/slides/slide9.xml><?xml version="1.0" encoding="utf-8"?>
+<p:sld xmlns:a="http://schemas.openxmlformats.org/drawingml/2006/main" xmlns:r="http://schemas.openxmlformats.org/officeDocument/2006/relationships" xmlns:p="http://schemas.openxmlformats.org/presentationml/2006/main">
+  <p:cSld>
+    <p:spTree>
+      <p:nvGrpSpPr>
+        <p:cNvPr id="1" name=""/>
+        <p:cNvGrpSpPr/>
+        <p:nvPr/>
+      </p:nvGrpSpPr>
+      <p:grpSpPr>
+        <a:xfrm>
+          <a:off x="0" y="0"/>
+          <a:ext cx="0" cy="0"/>
+          <a:chOff x="0" y="0"/>
+          <a:chExt cx="0" cy="0"/>
+        </a:xfrm>
+      </p:grpSpPr>
+      <p:sp>
+        <p:nvSpPr>
+          <p:cNvPr id="2" name="Title 1">
+            <a:extLst>
+              <a:ext uri="{FF2B5EF4-FFF2-40B4-BE49-F238E27FC236}">
+                <a16:creationId xmlns:a16="http://schemas.microsoft.com/office/drawing/2014/main" id="{57218FA8-0FFF-819D-B435-8D8712140BBD}"/>
+              </a:ext>
+            </a:extLst>
+          </p:cNvPr>
+          <p:cNvSpPr>
+            <a:spLocks noGrp="1"/>
+          </p:cNvSpPr>
+          <p:nvPr>
+            <p:ph type="title"/>
+          </p:nvPr>
+        </p:nvSpPr>
+        <p:spPr/>
+        <p:txBody>
+          <a:bodyPr/>
+          <a:lstStyle/>
+          <a:p>
+            <a:r>
+              <a:rPr lang="en-US" dirty="0" err="1"/>
+              <a:t>LogNormal</a:t>
+            </a:r>
+            <a:endParaRPr lang="en-US" dirty="0"/>
+          </a:p>
+        </p:txBody>
+      </p:sp>
+      <p:sp>
+        <p:nvSpPr>
+          <p:cNvPr id="3" name="Content Placeholder 2">
+            <a:extLst>
+              <a:ext uri="{FF2B5EF4-FFF2-40B4-BE49-F238E27FC236}">
+                <a16:creationId xmlns:a16="http://schemas.microsoft.com/office/drawing/2014/main" id="{45D62391-87F7-9690-3269-08991A78A373}"/>
+              </a:ext>
+            </a:extLst>
+          </p:cNvPr>
+          <p:cNvSpPr>
+            <a:spLocks noGrp="1"/>
+          </p:cNvSpPr>
+          <p:nvPr>
+            <p:ph idx="1"/>
+          </p:nvPr>
+        </p:nvSpPr>
+        <p:spPr>
+          <a:xfrm>
+            <a:off x="4335011" y="1853754"/>
+            <a:ext cx="7856989" cy="4199727"/>
+          </a:xfrm>
+        </p:spPr>
+        <p:txBody>
+          <a:bodyPr/>
+          <a:lstStyle/>
+          <a:p>
+            <a:r>
+              <a:rPr lang="en-US" dirty="0"/>
+              <a:t>Lognormal distributions are defined as having a normal log. </a:t>
+            </a:r>
+          </a:p>
+          <a:p>
+            <a:pPr lvl="1"/>
+            <a:r>
+              <a:rPr lang="en-CA" dirty="0"/>
+              <a:t>Y = ln(X) is normally distributed</a:t>
+            </a:r>
+          </a:p>
+          <a:p>
+            <a:pPr lvl="1"/>
+            <a:r>
+              <a:rPr lang="en-CA" dirty="0"/>
+              <a:t>We need to do transformations to get normal-denominated data. </a:t>
+            </a:r>
+          </a:p>
+          <a:p>
+            <a:r>
+              <a:rPr lang="en-CA" dirty="0"/>
+              <a:t>Defined by:</a:t>
+            </a:r>
+          </a:p>
+          <a:p>
+            <a:pPr lvl="1"/>
+            <a:r>
+              <a:rPr lang="en-CA" dirty="0"/>
+              <a:t>Mean of underlying normal data. </a:t>
+            </a:r>
+          </a:p>
+          <a:p>
+            <a:pPr lvl="1"/>
+            <a:r>
+              <a:rPr lang="en-CA" dirty="0"/>
+              <a:t>Standard deviation of underlying normal data. </a:t>
+            </a:r>
+          </a:p>
+          <a:p>
+            <a:r>
+              <a:rPr lang="en-CA" dirty="0" err="1"/>
+              <a:t>Scipy</a:t>
+            </a:r>
+            <a:r>
+              <a:rPr lang="en-CA" dirty="0"/>
+              <a:t> variables:</a:t>
+            </a:r>
+          </a:p>
+          <a:p>
+            <a:pPr lvl="1"/>
+            <a:r>
+              <a:rPr lang="en-CA" dirty="0"/>
+              <a:t>Loc = mean( log(DATA) )</a:t>
+            </a:r>
+          </a:p>
+          <a:p>
+            <a:pPr lvl="1"/>
+            <a:r>
+              <a:rPr lang="en-CA" dirty="0"/>
+              <a:t>Scale = std( log(DATA))</a:t>
+            </a:r>
+          </a:p>
+          <a:p>
+            <a:pPr lvl="1"/>
+            <a:endParaRPr lang="en-US" dirty="0"/>
+          </a:p>
+        </p:txBody>
+      </p:sp>
+      <p:pic>
+        <p:nvPicPr>
+          <p:cNvPr id="4" name="Picture 3" descr="numpy.random.lognormal — NumPy v2.2 Manual">
+            <a:extLst>
+              <a:ext uri="{FF2B5EF4-FFF2-40B4-BE49-F238E27FC236}">
+                <a16:creationId xmlns:a16="http://schemas.microsoft.com/office/drawing/2014/main" id="{3E9B117A-FF0C-C374-62DB-BCF4EEA73468}"/>
+              </a:ext>
+            </a:extLst>
+          </p:cNvPr>
+          <p:cNvPicPr>
+            <a:picLocks noChangeAspect="1"/>
+          </p:cNvPicPr>
+          <p:nvPr/>
+        </p:nvPicPr>
+        <p:blipFill>
+          <a:blip r:embed="rId2"/>
+          <a:stretch>
+            <a:fillRect/>
+          </a:stretch>
+        </p:blipFill>
+        <p:spPr>
+          <a:xfrm>
+            <a:off x="-124105" y="2528926"/>
+            <a:ext cx="4432300" cy="2743200"/>
+          </a:xfrm>
+          <a:prstGeom prst="rect">
+            <a:avLst/>
+          </a:prstGeom>
+        </p:spPr>
+      </p:pic>
+    </p:spTree>
+    <p:extLst>
+      <p:ext uri="{BB962C8B-B14F-4D97-AF65-F5344CB8AC3E}">
+        <p14:creationId xmlns:p14="http://schemas.microsoft.com/office/powerpoint/2010/main" val="1234007786"/>
       </p:ext>
     </p:extLst>
   </p:cSld>
